--- a/Crypto Fraud Presentation.pptx
+++ b/Crypto Fraud Presentation.pptx
@@ -4,6 +4,9 @@
   <p:sldMasterIdLst>
     <p:sldMasterId id="2147483648" r:id="rId1"/>
   </p:sldMasterIdLst>
+  <p:notesMasterIdLst>
+    <p:notesMasterId r:id="rId10"/>
+  </p:notesMasterIdLst>
   <p:sldIdLst>
     <p:sldId id="256" r:id="rId2"/>
     <p:sldId id="257" r:id="rId3"/>
@@ -14,9 +17,6 @@
     <p:sldId id="262" r:id="rId8"/>
     <p:sldId id="263" r:id="rId9"/>
   </p:sldIdLst>
-  <p:notesMasterIdLst>
-    <p:notesMasterId r:id="rId10"/>
-  </p:notesMasterIdLst>
   <p:sldSz cx="12192000" cy="6858000"/>
   <p:notesSz cx="6858000" cy="12192000"/>
   <p:defaultTextStyle>
@@ -111,7 +111,82 @@
       </a:defRPr>
     </a:lvl9pPr>
   </p:defaultTextStyle>
+  <p:extLst>
+    <p:ext uri="{EFAFB233-063F-42B5-8137-9DF3F51BA10A}">
+      <p15:sldGuideLst xmlns:p15="http://schemas.microsoft.com/office/powerpoint/2012/main"/>
+    </p:ext>
+  </p:extLst>
 </p:presentation>
+</file>
+
+<file path=ppt/changesInfos/changesInfo1.xml><?xml version="1.0" encoding="utf-8"?>
+<pc:chgInfo xmlns:a="http://schemas.openxmlformats.org/drawingml/2006/main" xmlns:r="http://schemas.openxmlformats.org/officeDocument/2006/relationships" xmlns:ac="http://schemas.microsoft.com/office/drawing/2013/main/command" xmlns:pc="http://schemas.microsoft.com/office/powerpoint/2013/main/command">
+  <pc:docChgLst>
+    <pc:chgData name="Manolis Tsiftsis" userId="04aaece2082b40e7" providerId="LiveId" clId="{48442419-AC4D-4915-A70C-70FF2F296BDB}"/>
+    <pc:docChg chg="modSld">
+      <pc:chgData name="Manolis Tsiftsis" userId="04aaece2082b40e7" providerId="LiveId" clId="{48442419-AC4D-4915-A70C-70FF2F296BDB}" dt="2026-10-18T20:48:25.552" v="13" actId="20577"/>
+      <pc:docMkLst>
+        <pc:docMk/>
+      </pc:docMkLst>
+      <pc:sldChg chg="modNotesTx">
+        <pc:chgData name="Manolis Tsiftsis" userId="04aaece2082b40e7" providerId="LiveId" clId="{48442419-AC4D-4915-A70C-70FF2F296BDB}" dt="2026-10-18T20:47:38.104" v="2" actId="20577"/>
+        <pc:sldMkLst>
+          <pc:docMk/>
+          <pc:sldMk cId="0" sldId="256"/>
+        </pc:sldMkLst>
+      </pc:sldChg>
+      <pc:sldChg chg="modNotesTx">
+        <pc:chgData name="Manolis Tsiftsis" userId="04aaece2082b40e7" providerId="LiveId" clId="{48442419-AC4D-4915-A70C-70FF2F296BDB}" dt="2026-10-18T20:47:54.110" v="5" actId="20577"/>
+        <pc:sldMkLst>
+          <pc:docMk/>
+          <pc:sldMk cId="0" sldId="257"/>
+        </pc:sldMkLst>
+      </pc:sldChg>
+      <pc:sldChg chg="modNotesTx">
+        <pc:chgData name="Manolis Tsiftsis" userId="04aaece2082b40e7" providerId="LiveId" clId="{48442419-AC4D-4915-A70C-70FF2F296BDB}" dt="2026-10-18T20:48:02.434" v="8" actId="20577"/>
+        <pc:sldMkLst>
+          <pc:docMk/>
+          <pc:sldMk cId="0" sldId="258"/>
+        </pc:sldMkLst>
+      </pc:sldChg>
+      <pc:sldChg chg="modNotesTx">
+        <pc:chgData name="Manolis Tsiftsis" userId="04aaece2082b40e7" providerId="LiveId" clId="{48442419-AC4D-4915-A70C-70FF2F296BDB}" dt="2026-10-18T20:48:05.656" v="9" actId="20577"/>
+        <pc:sldMkLst>
+          <pc:docMk/>
+          <pc:sldMk cId="0" sldId="259"/>
+        </pc:sldMkLst>
+      </pc:sldChg>
+      <pc:sldChg chg="modNotesTx">
+        <pc:chgData name="Manolis Tsiftsis" userId="04aaece2082b40e7" providerId="LiveId" clId="{48442419-AC4D-4915-A70C-70FF2F296BDB}" dt="2026-10-18T20:48:11.540" v="10" actId="20577"/>
+        <pc:sldMkLst>
+          <pc:docMk/>
+          <pc:sldMk cId="0" sldId="260"/>
+        </pc:sldMkLst>
+      </pc:sldChg>
+      <pc:sldChg chg="modNotesTx">
+        <pc:chgData name="Manolis Tsiftsis" userId="04aaece2082b40e7" providerId="LiveId" clId="{48442419-AC4D-4915-A70C-70FF2F296BDB}" dt="2026-10-18T20:48:18.974" v="11" actId="20577"/>
+        <pc:sldMkLst>
+          <pc:docMk/>
+          <pc:sldMk cId="0" sldId="261"/>
+        </pc:sldMkLst>
+      </pc:sldChg>
+      <pc:sldChg chg="modNotesTx">
+        <pc:chgData name="Manolis Tsiftsis" userId="04aaece2082b40e7" providerId="LiveId" clId="{48442419-AC4D-4915-A70C-70FF2F296BDB}" dt="2026-10-18T20:48:22.686" v="12" actId="20577"/>
+        <pc:sldMkLst>
+          <pc:docMk/>
+          <pc:sldMk cId="0" sldId="262"/>
+        </pc:sldMkLst>
+      </pc:sldChg>
+      <pc:sldChg chg="modNotesTx">
+        <pc:chgData name="Manolis Tsiftsis" userId="04aaece2082b40e7" providerId="LiveId" clId="{48442419-AC4D-4915-A70C-70FF2F296BDB}" dt="2026-10-18T20:48:25.552" v="13" actId="20577"/>
+        <pc:sldMkLst>
+          <pc:docMk/>
+          <pc:sldMk cId="0" sldId="263"/>
+        </pc:sldMkLst>
+      </pc:sldChg>
+    </pc:docChg>
+  </pc:docChgLst>
+</pc:chgInfo>
 </file>
 
 <file path=ppt/notesMasters/notesMaster1.xml><?xml version="1.0" encoding="utf-8"?>
@@ -136,234 +211,10 @@
           <a:chExt cx="0" cy="0"/>
         </a:xfrm>
       </p:grpSpPr>
-      <p:sp>
-        <p:nvSpPr>
-          <p:cNvPr id="2" name="Header Placeholder 1"/>
-          <p:cNvSpPr>
-            <a:spLocks noGrp="1"/>
-          </p:cNvSpPr>
-          <p:nvPr>
-            <p:ph type="hdr" sz="quarter"/>
-          </p:nvPr>
-        </p:nvSpPr>
-        <p:spPr>
-          <a:xfrm>
-            <a:off x="0" y="0"/>
-            <a:ext cx="2971800" cy="458788"/>
-          </a:xfrm>
-          <a:prstGeom prst="rect">
-            <a:avLst/>
-          </a:prstGeom>
-        </p:spPr>
-        <p:txBody>
-          <a:bodyPr vert="horz" lIns="91440" tIns="45720" rIns="91440" bIns="45720" rtlCol="0"/>
-          <a:lstStyle>
-            <a:lvl1pPr algn="l">
-              <a:defRPr sz="1200"/>
-            </a:lvl1pPr>
-          </a:lstStyle>
-          <a:p>
-            <a:endParaRPr lang="en-US"/>
-          </a:p>
-        </p:txBody>
-      </p:sp>
-      <p:sp>
-        <p:nvSpPr>
-          <p:cNvPr id="3" name="Date Placeholder 2"/>
-          <p:cNvSpPr>
-            <a:spLocks noGrp="1"/>
-          </p:cNvSpPr>
-          <p:nvPr>
-            <p:ph type="dt" idx="1"/>
-          </p:nvPr>
-        </p:nvSpPr>
-        <p:spPr>
-          <a:xfrm>
-            <a:off x="3884613" y="0"/>
-            <a:ext cx="2971800" cy="458788"/>
-          </a:xfrm>
-          <a:prstGeom prst="rect">
-            <a:avLst/>
-          </a:prstGeom>
-        </p:spPr>
-        <p:txBody>
-          <a:bodyPr vert="horz" lIns="91440" tIns="45720" rIns="91440" bIns="45720" rtlCol="0"/>
-          <a:lstStyle>
-            <a:lvl1pPr algn="r">
-              <a:defRPr sz="1200"/>
-            </a:lvl1pPr>
-          </a:lstStyle>
-          <a:p>
-            <a:fld id="{5282F153-3F37-0F45-9E97-73ACFA13230C}" type="datetimeFigureOut">
-              <a:rPr lang="en-US"/>
-              <a:t>7/23/19</a:t>
-            </a:fld>
-            <a:endParaRPr lang="en-US"/>
-          </a:p>
-        </p:txBody>
-      </p:sp>
-      <p:sp>
-        <p:nvSpPr>
-          <p:cNvPr id="4" name="Slide Image Placeholder 3"/>
-          <p:cNvSpPr>
-            <a:spLocks noGrp="1" noRot="1" noChangeAspect="1"/>
-          </p:cNvSpPr>
-          <p:nvPr>
-            <p:ph type="sldImg" idx="2"/>
-          </p:nvPr>
-        </p:nvSpPr>
-        <p:spPr>
-          <a:xfrm>
-            <a:off x="685800" y="1143000"/>
-            <a:ext cx="5486400" cy="3086100"/>
-          </a:xfrm>
-          <a:prstGeom prst="rect">
-            <a:avLst/>
-          </a:prstGeom>
-          <a:noFill/>
-          <a:ln w="12700">
-            <a:solidFill>
-              <a:prstClr val="black"/>
-            </a:solidFill>
-          </a:ln>
-        </p:spPr>
-        <p:txBody>
-          <a:bodyPr vert="horz" lIns="91440" tIns="45720" rIns="91440" bIns="45720" rtlCol="0" anchor="ctr"/>
-          <a:lstStyle/>
-          <a:p>
-            <a:endParaRPr lang="en-US"/>
-          </a:p>
-        </p:txBody>
-      </p:sp>
-      <p:sp>
-        <p:nvSpPr>
-          <p:cNvPr id="5" name="Notes Placeholder 4"/>
-          <p:cNvSpPr>
-            <a:spLocks noGrp="1"/>
-          </p:cNvSpPr>
-          <p:nvPr>
-            <p:ph type="body" sz="quarter" idx="3"/>
-          </p:nvPr>
-        </p:nvSpPr>
-        <p:spPr>
-          <a:xfrm>
-            <a:off x="685800" y="4400550"/>
-            <a:ext cx="5486400" cy="3600450"/>
-          </a:xfrm>
-          <a:prstGeom prst="rect">
-            <a:avLst/>
-          </a:prstGeom>
-        </p:spPr>
-        <p:txBody>
-          <a:bodyPr vert="horz" lIns="91440" tIns="45720" rIns="91440" bIns="45720" rtlCol="0"/>
-          <a:lstStyle/>
-          <a:p>
-            <a:pPr lvl="0"/>
-            <a:r>
-              <a:rPr lang="en-US"/>
-              <a:t>Click to edit Master text styles</a:t>
-            </a:r>
-          </a:p>
-          <a:p>
-            <a:pPr lvl="1"/>
-            <a:r>
-              <a:rPr lang="en-US"/>
-              <a:t>Second level</a:t>
-            </a:r>
-          </a:p>
-          <a:p>
-            <a:pPr lvl="2"/>
-            <a:r>
-              <a:rPr lang="en-US"/>
-              <a:t>Third level</a:t>
-            </a:r>
-          </a:p>
-          <a:p>
-            <a:pPr lvl="3"/>
-            <a:r>
-              <a:rPr lang="en-US"/>
-              <a:t>Fourth level</a:t>
-            </a:r>
-          </a:p>
-          <a:p>
-            <a:pPr lvl="4"/>
-            <a:r>
-              <a:rPr lang="en-US"/>
-              <a:t>Fifth level</a:t>
-            </a:r>
-          </a:p>
-        </p:txBody>
-      </p:sp>
-      <p:sp>
-        <p:nvSpPr>
-          <p:cNvPr id="6" name="Footer Placeholder 5"/>
-          <p:cNvSpPr>
-            <a:spLocks noGrp="1"/>
-          </p:cNvSpPr>
-          <p:nvPr>
-            <p:ph type="ftr" sz="quarter" idx="4"/>
-          </p:nvPr>
-        </p:nvSpPr>
-        <p:spPr>
-          <a:xfrm>
-            <a:off x="0" y="8685213"/>
-            <a:ext cx="2971800" cy="458787"/>
-          </a:xfrm>
-          <a:prstGeom prst="rect">
-            <a:avLst/>
-          </a:prstGeom>
-        </p:spPr>
-        <p:txBody>
-          <a:bodyPr vert="horz" lIns="91440" tIns="45720" rIns="91440" bIns="45720" rtlCol="0" anchor="b"/>
-          <a:lstStyle>
-            <a:lvl1pPr algn="l">
-              <a:defRPr sz="1200"/>
-            </a:lvl1pPr>
-          </a:lstStyle>
-          <a:p>
-            <a:endParaRPr lang="en-US"/>
-          </a:p>
-        </p:txBody>
-      </p:sp>
-      <p:sp>
-        <p:nvSpPr>
-          <p:cNvPr id="7" name="Slide Number Placeholder 6"/>
-          <p:cNvSpPr>
-            <a:spLocks noGrp="1"/>
-          </p:cNvSpPr>
-          <p:nvPr>
-            <p:ph type="sldNum" sz="quarter" idx="5"/>
-          </p:nvPr>
-        </p:nvSpPr>
-        <p:spPr>
-          <a:xfrm>
-            <a:off x="3884613" y="8685213"/>
-            <a:ext cx="2971800" cy="458787"/>
-          </a:xfrm>
-          <a:prstGeom prst="rect">
-            <a:avLst/>
-          </a:prstGeom>
-        </p:spPr>
-        <p:txBody>
-          <a:bodyPr vert="horz" lIns="91440" tIns="45720" rIns="91440" bIns="45720" rtlCol="0" anchor="b"/>
-          <a:lstStyle>
-            <a:lvl1pPr algn="r">
-              <a:defRPr sz="1200"/>
-            </a:lvl1pPr>
-          </a:lstStyle>
-          <a:p>
-            <a:fld id="{CE5E9CC1-C706-0F49-92D6-E571CC5EEA8F}" type="slidenum">
-              <a:rPr lang="en-US"/>
-              <a:t>‹#›</a:t>
-            </a:fld>
-            <a:endParaRPr lang="en-US"/>
-          </a:p>
-        </p:txBody>
-      </p:sp>
     </p:spTree>
     <p:extLst>
       <p:ext uri="{BB962C8B-B14F-4D97-AF65-F5344CB8AC3E}">
-        <p14:creationId xmlns:p14="http://schemas.microsoft.com/office/powerpoint/2010/main" val="1024086991"/>
+        <p14:creationId xmlns:p14="http://schemas.microsoft.com/office/powerpoint/2010/main" val="2971047957"/>
       </p:ext>
     </p:extLst>
   </p:cSld>
@@ -507,10 +358,6 @@
           <a:bodyPr/>
           <a:lstStyle/>
           <a:p>
-            <a:r>
-              <a:rPr lang="en-US" dirty="0"/>
-              <a:t>Whoever opens (about 10 seconds): “Hi, we are [team name]. Our client is a crypto exchange that wants to catch fraudulent transactions before the money leaves. We built a Streamlit app for that.” Then hand over to the first speaker.</a:t>
-            </a:r>
             <a:endParaRPr lang="en-US" dirty="0"/>
           </a:p>
         </p:txBody>
@@ -595,10 +442,6 @@
           <a:bodyPr/>
           <a:lstStyle/>
           <a:p>
-            <a:r>
-              <a:rPr lang="en-US" dirty="0"/>
-              <a:t>Speaker: anyone, 10 seconds. “Introducing the dream team: Vadim, Spyros, Manos and Luca.” Each person can raise a hand or wave when their name is said.</a:t>
-            </a:r>
             <a:endParaRPr lang="en-US" dirty="0"/>
           </a:p>
         </p:txBody>
@@ -683,10 +526,6 @@
           <a:bodyPr/>
           <a:lstStyle/>
           <a:p>
-            <a:r>
-              <a:rPr lang="en-US" dirty="0"/>
-              <a:t>Speaker: [design person 1], about 1 minute. “Our client is a crypto exchange. The user is a fraud analyst who has to decide quickly whether a flagged transaction is fraud. We wrote down three questions the app has to answer [read them]. The machine learning goal is classification: fraud or clean.” CHECK: replace the three questions with the exact ones from your Requirements Document (1.3.1) if they are worded differently.</a:t>
-            </a:r>
             <a:endParaRPr lang="en-US" dirty="0"/>
           </a:p>
         </p:txBody>
@@ -771,10 +610,6 @@
           <a:bodyPr/>
           <a:lstStyle/>
           <a:p>
-            <a:r>
-              <a:rPr lang="en-US" dirty="0"/>
-              <a:t>Speaker: [design person 2], about 1 minute. “This is how data moves through our system: the raw CSV, the SQL checks, the five features we kept, the saved KNN model, and finally the Streamlit app. These are our layout sketches. The app has two pages: Statistics, where you pick a feature and compare fraud with clean, and Fraud classification, where you type in a transaction and get a verdict plus the three most similar past transactions.” TIP: if you have a cleaner data flow diagram, swap the arrow row for a picture of it.</a:t>
-            </a:r>
             <a:endParaRPr lang="en-US" dirty="0"/>
           </a:p>
         </p:txBody>
@@ -859,10 +694,6 @@
           <a:bodyPr/>
           <a:lstStyle/>
           <a:p>
-            <a:r>
-              <a:rPr lang="en-US" dirty="0"/>
-              <a:t>Speaker: Manos, about 1 minute. “We checked the data first. 400 transactions, 175 fraud and 225 clean. There were no missing values, and with SQL we checked every column for impossible values, like negative amounts or hours above 23. We found none. We did find outliers, but we kept them, because fraud is often unusual and the values were real. The clearest pattern was the verification stage: 55 percent of the unverified accounts were fraud, against 41 percent for basic and 38 percent for full.”</a:t>
-            </a:r>
             <a:endParaRPr lang="en-US" dirty="0"/>
           </a:p>
         </p:txBody>
@@ -947,10 +778,6 @@
           <a:bodyPr/>
           <a:lstStyle/>
           <a:p>
-            <a:r>
-              <a:rPr lang="en-US" dirty="0"/>
-              <a:t>Speaker: [your friend’s name], about 1 minute. “At first we used SQL to compare the average of every column for fraud and clean transactions. The columns with a clear difference looked useful, so those were our candidates. Then we did backward elimination: we removed them one by one and checked the error. Balance change and the share of new addresses didn’t make the model better, so we dropped them. We kept five features. The model is KNN with k equals 3, and on 80 transactions it had never seen it is right 70 percent of the time, which is an MAE of 0.30.” If asked: for a 0/1 classifier the MAE is just the share of wrong answers, so 0.30 MAE = 30% wrong = 70% correct.</a:t>
-            </a:r>
             <a:endParaRPr lang="en-US" dirty="0"/>
           </a:p>
         </p:txBody>
@@ -1035,10 +862,6 @@
           <a:bodyPr/>
           <a:lstStyle/>
           <a:p>
-            <a:r>
-              <a:rPr lang="en-US" dirty="0"/>
-              <a:t>Speaker: [whoever built the pages], 2 to 3 minutes. Switch to the app (already running: streamlit run Statistics.py). 1. Statistics page: choose “amount”, point at the fraud mean vs the clean mean. Then choose “kyc_tier” and show the fraud rate table. 2. Fraud classification page, example that comes out FRAUD: amount 85.26, wallet age 58, seconds between transactions 536, standard deviation 1147, verification stage unverified. Submit, read the verdict, point at the 3 most similar past transactions. 3. Example that comes out NOT FRAUD: amount 196.97, wallet age 113, seconds between transactions 1060, standard deviation 931, verification stage full. Write these two examples on paper before the presentation.</a:t>
-            </a:r>
             <a:endParaRPr lang="en-US" dirty="0"/>
           </a:p>
         </p:txBody>
@@ -1123,10 +946,6 @@
           <a:bodyPr/>
           <a:lstStyle/>
           <a:p>
-            <a:r>
-              <a:rPr lang="en-US" dirty="0"/>
-              <a:t>Speaker: anyone, about 30 seconds. “Two of us did the requirements and the design, two of us did the data and the model, and at the end we put everything together in one Streamlit app. We learned that fewer, useful features work better than all of them. Our test set has only 80 transactions, so small differences are not very reliable; next time we would use cross-validation. We would also show a fraud probability and only ask for the fields the model really uses. Thank you, any questions?”</a:t>
-            </a:r>
             <a:endParaRPr lang="en-US" dirty="0"/>
           </a:p>
         </p:txBody>
@@ -1205,6 +1024,7 @@
         <a:solidFill>
           <a:srgbClr val="FBFBFD"/>
         </a:solidFill>
+        <a:effectLst/>
       </p:bgPr>
     </p:bg>
     <p:spTree>
@@ -1224,7 +1044,9 @@
       <p:sp>
         <p:nvSpPr>
           <p:cNvPr id="2" name="Title Placeholder 1"/>
-          <p:cNvSpPr/>
+          <p:cNvSpPr>
+            <a:spLocks noGrp="1"/>
+          </p:cNvSpPr>
           <p:nvPr>
             <p:ph type="title"/>
           </p:nvPr>
@@ -1243,7 +1065,7 @@
         <p:txBody>
           <a:bodyPr wrap="square" lIns="0" tIns="0" rIns="0" bIns="0" rtlCol="0" anchor="t"/>
           <a:lstStyle>
-            <a:lvl1pPr algn="l" indent="0" marL="0">
+            <a:lvl1pPr marL="0" indent="0" algn="l">
               <a:lnSpc>
                 <a:spcPct val="115000"/>
               </a:lnSpc>
@@ -1259,7 +1081,7 @@
             </a:lvl1pPr>
           </a:lstStyle>
           <a:p>
-            <a:pPr algn="l" indent="0" marL="0">
+            <a:pPr marL="0" indent="0" algn="l">
               <a:lnSpc>
                 <a:spcPct val="115000"/>
               </a:lnSpc>
@@ -1272,9 +1094,11 @@
       <p:sp>
         <p:nvSpPr>
           <p:cNvPr id="3" name="Text Placeholder 2"/>
-          <p:cNvSpPr/>
+          <p:cNvSpPr>
+            <a:spLocks noGrp="1"/>
+          </p:cNvSpPr>
           <p:nvPr>
-            <p:ph idx="101" type="body"/>
+            <p:ph type="body" idx="101"/>
           </p:nvPr>
         </p:nvSpPr>
         <p:spPr>
@@ -1291,7 +1115,7 @@
         <p:txBody>
           <a:bodyPr wrap="square" lIns="0" tIns="0" rIns="0" bIns="0" rtlCol="0" anchor="t"/>
           <a:lstStyle>
-            <a:lvl1pPr algn="l" indent="0" marL="0">
+            <a:lvl1pPr marL="0" indent="0" algn="l">
               <a:lnSpc>
                 <a:spcPct val="140000"/>
               </a:lnSpc>
@@ -1307,7 +1131,7 @@
             </a:lvl1pPr>
           </a:lstStyle>
           <a:p>
-            <a:pPr algn="l" indent="0" marL="0">
+            <a:pPr marL="0" indent="0" algn="l">
               <a:lnSpc>
                 <a:spcPct val="140000"/>
               </a:lnSpc>
@@ -1333,6 +1157,7 @@
         <a:solidFill>
           <a:srgbClr val="FBFBFD"/>
         </a:solidFill>
+        <a:effectLst/>
       </p:bgPr>
     </p:bg>
     <p:spTree>
@@ -1352,7 +1177,9 @@
       <p:sp>
         <p:nvSpPr>
           <p:cNvPr id="2" name="Title Placeholder 1"/>
-          <p:cNvSpPr/>
+          <p:cNvSpPr>
+            <a:spLocks noGrp="1"/>
+          </p:cNvSpPr>
           <p:nvPr>
             <p:ph type="title"/>
           </p:nvPr>
@@ -1371,7 +1198,7 @@
         <p:txBody>
           <a:bodyPr wrap="square" lIns="0" tIns="0" rIns="0" bIns="0" rtlCol="0" anchor="t"/>
           <a:lstStyle>
-            <a:lvl1pPr algn="l" indent="0" marL="0">
+            <a:lvl1pPr marL="0" indent="0" algn="l">
               <a:lnSpc>
                 <a:spcPct val="115000"/>
               </a:lnSpc>
@@ -1387,7 +1214,7 @@
             </a:lvl1pPr>
           </a:lstStyle>
           <a:p>
-            <a:pPr algn="l" indent="0" marL="0">
+            <a:pPr marL="0" indent="0" algn="l">
               <a:lnSpc>
                 <a:spcPct val="115000"/>
               </a:lnSpc>
@@ -1400,9 +1227,11 @@
       <p:sp>
         <p:nvSpPr>
           <p:cNvPr id="3" name="Text Placeholder 2"/>
-          <p:cNvSpPr/>
+          <p:cNvSpPr>
+            <a:spLocks noGrp="1"/>
+          </p:cNvSpPr>
           <p:nvPr>
-            <p:ph idx="101" type="body"/>
+            <p:ph type="body" idx="101"/>
           </p:nvPr>
         </p:nvSpPr>
         <p:spPr>
@@ -1419,7 +1248,7 @@
         <p:txBody>
           <a:bodyPr wrap="square" lIns="0" tIns="0" rIns="0" bIns="0" rtlCol="0" anchor="t"/>
           <a:lstStyle>
-            <a:lvl1pPr algn="l" indent="0" marL="0">
+            <a:lvl1pPr marL="0" indent="0" algn="l">
               <a:lnSpc>
                 <a:spcPct val="140000"/>
               </a:lnSpc>
@@ -1435,7 +1264,7 @@
             </a:lvl1pPr>
           </a:lstStyle>
           <a:p>
-            <a:pPr algn="l" indent="0" marL="0">
+            <a:pPr marL="0" indent="0" algn="l">
               <a:lnSpc>
                 <a:spcPct val="140000"/>
               </a:lnSpc>
@@ -1714,6 +1543,7 @@
         <a:solidFill>
           <a:srgbClr val="FBFBFD"/>
         </a:solidFill>
+        <a:effectLst/>
       </p:bgPr>
     </p:bg>
     <p:spTree>
@@ -1753,7 +1583,7 @@
           </a:bodyPr>
           <a:lstStyle/>
           <a:p>
-            <a:pPr algn="l" indent="0" marL="0">
+            <a:pPr marL="0" indent="0" algn="l">
               <a:lnSpc>
                 <a:spcPts val="2240"/>
               </a:lnSpc>
@@ -1777,7 +1607,9 @@
       <p:sp>
         <p:nvSpPr>
           <p:cNvPr id="3" name="Text 1"/>
-          <p:cNvSpPr/>
+          <p:cNvSpPr>
+            <a:spLocks noGrp="1"/>
+          </p:cNvSpPr>
           <p:nvPr>
             <p:ph type="title"/>
           </p:nvPr>
@@ -1799,14 +1631,14 @@
           </a:bodyPr>
           <a:lstStyle/>
           <a:p>
-            <a:pPr algn="l" indent="0" marL="0">
+            <a:pPr marL="0" indent="0" algn="l">
               <a:lnSpc>
                 <a:spcPts val="7350"/>
               </a:lnSpc>
               <a:buNone/>
             </a:pPr>
             <a:r>
-              <a:rPr lang="en-US" sz="7000" b="1" i="0" spc="-200" kern="0" dirty="0">
+              <a:rPr lang="en-US" sz="7000" b="1" i="0" kern="0" spc="-200" dirty="0">
                 <a:solidFill>
                   <a:srgbClr val="1D1D1F"/>
                 </a:solidFill>
@@ -1843,7 +1675,7 @@
           </a:bodyPr>
           <a:lstStyle/>
           <a:p>
-            <a:pPr algn="l" indent="0" marL="0">
+            <a:pPr marL="0" indent="0" algn="l">
               <a:lnSpc>
                 <a:spcPts val="2860"/>
               </a:lnSpc>
@@ -1880,6 +1712,7 @@
         <a:solidFill>
           <a:srgbClr val="FBFBFD"/>
         </a:solidFill>
+        <a:effectLst/>
       </p:bgPr>
     </p:bg>
     <p:spTree>
@@ -1919,7 +1752,7 @@
           </a:bodyPr>
           <a:lstStyle/>
           <a:p>
-            <a:pPr algn="l" indent="0" marL="0">
+            <a:pPr marL="0" indent="0" algn="l">
               <a:lnSpc>
                 <a:spcPts val="2240"/>
               </a:lnSpc>
@@ -1943,7 +1776,9 @@
       <p:sp>
         <p:nvSpPr>
           <p:cNvPr id="3" name="Text 1"/>
-          <p:cNvSpPr/>
+          <p:cNvSpPr>
+            <a:spLocks noGrp="1"/>
+          </p:cNvSpPr>
           <p:nvPr>
             <p:ph type="title"/>
           </p:nvPr>
@@ -1965,14 +1800,14 @@
           </a:bodyPr>
           <a:lstStyle/>
           <a:p>
-            <a:pPr algn="l" indent="0" marL="0">
+            <a:pPr marL="0" indent="0" algn="l">
               <a:lnSpc>
                 <a:spcPts val="7350"/>
               </a:lnSpc>
               <a:buNone/>
             </a:pPr>
             <a:r>
-              <a:rPr lang="en-US" sz="7000" b="1" i="0" spc="-200" kern="0" dirty="0">
+              <a:rPr lang="en-US" sz="7000" b="1" i="0" kern="0" spc="-200" dirty="0">
                 <a:solidFill>
                   <a:srgbClr val="1D1D1F"/>
                 </a:solidFill>
@@ -2009,7 +1844,7 @@
           </a:bodyPr>
           <a:lstStyle/>
           <a:p>
-            <a:pPr algn="l" marL="294386" indent="-294386">
+            <a:pPr marL="294386" indent="-294386" algn="l">
               <a:lnSpc>
                 <a:spcPts val="3920"/>
               </a:lnSpc>
@@ -2054,7 +1889,7 @@
           </a:bodyPr>
           <a:lstStyle/>
           <a:p>
-            <a:pPr algn="l" marL="294386" indent="-294386">
+            <a:pPr marL="294386" indent="-294386" algn="l">
               <a:lnSpc>
                 <a:spcPts val="3920"/>
               </a:lnSpc>
@@ -2099,7 +1934,7 @@
           </a:bodyPr>
           <a:lstStyle/>
           <a:p>
-            <a:pPr algn="l" marL="294386" indent="-294386">
+            <a:pPr marL="294386" indent="-294386" algn="l">
               <a:lnSpc>
                 <a:spcPts val="3920"/>
               </a:lnSpc>
@@ -2144,7 +1979,7 @@
           </a:bodyPr>
           <a:lstStyle/>
           <a:p>
-            <a:pPr algn="l" marL="294386" indent="-294386">
+            <a:pPr marL="294386" indent="-294386" algn="l">
               <a:lnSpc>
                 <a:spcPts val="3920"/>
               </a:lnSpc>
@@ -2182,6 +2017,7 @@
         <a:solidFill>
           <a:srgbClr val="FBFBFD"/>
         </a:solidFill>
+        <a:effectLst/>
       </p:bgPr>
     </p:bg>
     <p:spTree>
@@ -2201,7 +2037,9 @@
       <p:sp>
         <p:nvSpPr>
           <p:cNvPr id="2" name="Text 0"/>
-          <p:cNvSpPr/>
+          <p:cNvSpPr>
+            <a:spLocks noGrp="1"/>
+          </p:cNvSpPr>
           <p:nvPr>
             <p:ph type="title"/>
           </p:nvPr>
@@ -2223,14 +2061,14 @@
           </a:bodyPr>
           <a:lstStyle/>
           <a:p>
-            <a:pPr algn="l" indent="0" marL="0">
+            <a:pPr marL="0" indent="0" algn="l">
               <a:lnSpc>
                 <a:spcPts val="3960"/>
               </a:lnSpc>
               <a:buNone/>
             </a:pPr>
             <a:r>
-              <a:rPr lang="en-US" sz="3600" b="1" i="0" spc="-100" kern="0" dirty="0">
+              <a:rPr lang="en-US" sz="3600" b="1" i="0" kern="0" spc="-100" dirty="0">
                 <a:solidFill>
                   <a:srgbClr val="1D1D1F"/>
                 </a:solidFill>
@@ -2267,14 +2105,14 @@
           </a:bodyPr>
           <a:lstStyle/>
           <a:p>
-            <a:pPr algn="l" indent="0" marL="0">
+            <a:pPr marL="0" indent="0" algn="l">
               <a:lnSpc>
                 <a:spcPts val="1680"/>
               </a:lnSpc>
               <a:buNone/>
             </a:pPr>
             <a:r>
-              <a:rPr lang="en-US" sz="1200" b="1" spc="100" kern="0" dirty="0">
+              <a:rPr lang="en-US" sz="1200" b="1" kern="0" spc="100" dirty="0">
                 <a:solidFill>
                   <a:srgbClr val="6E6E73"/>
                 </a:solidFill>
@@ -2311,7 +2149,7 @@
           </a:bodyPr>
           <a:lstStyle/>
           <a:p>
-            <a:pPr algn="l" indent="0" marL="0">
+            <a:pPr marL="0" indent="0" algn="l">
               <a:lnSpc>
                 <a:spcPts val="2500"/>
               </a:lnSpc>
@@ -2355,14 +2193,14 @@
           </a:bodyPr>
           <a:lstStyle/>
           <a:p>
-            <a:pPr algn="l" indent="0" marL="0">
+            <a:pPr marL="0" indent="0" algn="l">
               <a:lnSpc>
                 <a:spcPts val="1680"/>
               </a:lnSpc>
               <a:buNone/>
             </a:pPr>
             <a:r>
-              <a:rPr lang="en-US" sz="1200" b="1" spc="100" kern="0" dirty="0">
+              <a:rPr lang="en-US" sz="1200" b="1" kern="0" spc="100" dirty="0">
                 <a:solidFill>
                   <a:srgbClr val="6E6E73"/>
                 </a:solidFill>
@@ -2399,7 +2237,7 @@
           </a:bodyPr>
           <a:lstStyle/>
           <a:p>
-            <a:pPr algn="l" indent="0" marL="0">
+            <a:pPr marL="0" indent="0" algn="l">
               <a:lnSpc>
                 <a:spcPts val="2500"/>
               </a:lnSpc>
@@ -2443,14 +2281,14 @@
           </a:bodyPr>
           <a:lstStyle/>
           <a:p>
-            <a:pPr algn="l" indent="0" marL="0">
+            <a:pPr marL="0" indent="0" algn="l">
               <a:lnSpc>
                 <a:spcPts val="1680"/>
               </a:lnSpc>
               <a:buNone/>
             </a:pPr>
             <a:r>
-              <a:rPr lang="en-US" sz="1200" b="1" spc="100" kern="0" dirty="0">
+              <a:rPr lang="en-US" sz="1200" b="1" kern="0" spc="100" dirty="0">
                 <a:solidFill>
                   <a:srgbClr val="6E6E73"/>
                 </a:solidFill>
@@ -2487,7 +2325,7 @@
           </a:bodyPr>
           <a:lstStyle/>
           <a:p>
-            <a:pPr algn="l" indent="0" marL="0">
+            <a:pPr marL="0" indent="0" algn="l">
               <a:lnSpc>
                 <a:spcPts val="2500"/>
               </a:lnSpc>
@@ -2534,6 +2372,13 @@
             <a:prstDash val="solid"/>
           </a:ln>
         </p:spPr>
+        <p:txBody>
+          <a:bodyPr/>
+          <a:lstStyle/>
+          <a:p>
+            <a:endParaRPr lang="en-GB"/>
+          </a:p>
+        </p:txBody>
       </p:sp>
       <p:sp>
         <p:nvSpPr>
@@ -2558,7 +2403,7 @@
           </a:bodyPr>
           <a:lstStyle/>
           <a:p>
-            <a:pPr algn="l" indent="0" marL="0">
+            <a:pPr marL="0" indent="0" algn="l">
               <a:lnSpc>
                 <a:spcPts val="3360"/>
               </a:lnSpc>
@@ -2602,7 +2447,7 @@
           </a:bodyPr>
           <a:lstStyle/>
           <a:p>
-            <a:pPr algn="l" indent="0" marL="0">
+            <a:pPr marL="0" indent="0" algn="l">
               <a:lnSpc>
                 <a:spcPts val="2210"/>
               </a:lnSpc>
@@ -2649,6 +2494,13 @@
             <a:prstDash val="solid"/>
           </a:ln>
         </p:spPr>
+        <p:txBody>
+          <a:bodyPr/>
+          <a:lstStyle/>
+          <a:p>
+            <a:endParaRPr lang="en-GB"/>
+          </a:p>
+        </p:txBody>
       </p:sp>
       <p:sp>
         <p:nvSpPr>
@@ -2673,7 +2525,7 @@
           </a:bodyPr>
           <a:lstStyle/>
           <a:p>
-            <a:pPr algn="l" indent="0" marL="0">
+            <a:pPr marL="0" indent="0" algn="l">
               <a:lnSpc>
                 <a:spcPts val="3360"/>
               </a:lnSpc>
@@ -2717,7 +2569,7 @@
           </a:bodyPr>
           <a:lstStyle/>
           <a:p>
-            <a:pPr algn="l" indent="0" marL="0">
+            <a:pPr marL="0" indent="0" algn="l">
               <a:lnSpc>
                 <a:spcPts val="2210"/>
               </a:lnSpc>
@@ -2764,6 +2616,13 @@
             <a:prstDash val="solid"/>
           </a:ln>
         </p:spPr>
+        <p:txBody>
+          <a:bodyPr/>
+          <a:lstStyle/>
+          <a:p>
+            <a:endParaRPr lang="en-GB"/>
+          </a:p>
+        </p:txBody>
       </p:sp>
       <p:sp>
         <p:nvSpPr>
@@ -2788,7 +2647,7 @@
           </a:bodyPr>
           <a:lstStyle/>
           <a:p>
-            <a:pPr algn="l" indent="0" marL="0">
+            <a:pPr marL="0" indent="0" algn="l">
               <a:lnSpc>
                 <a:spcPts val="3360"/>
               </a:lnSpc>
@@ -2832,7 +2691,7 @@
           </a:bodyPr>
           <a:lstStyle/>
           <a:p>
-            <a:pPr algn="l" indent="0" marL="0">
+            <a:pPr marL="0" indent="0" algn="l">
               <a:lnSpc>
                 <a:spcPts val="2210"/>
               </a:lnSpc>
@@ -2869,6 +2728,7 @@
         <a:solidFill>
           <a:srgbClr val="FBFBFD"/>
         </a:solidFill>
+        <a:effectLst/>
       </p:bgPr>
     </p:bg>
     <p:spTree>
@@ -2888,7 +2748,9 @@
       <p:sp>
         <p:nvSpPr>
           <p:cNvPr id="2" name="Text 0"/>
-          <p:cNvSpPr/>
+          <p:cNvSpPr>
+            <a:spLocks noGrp="1"/>
+          </p:cNvSpPr>
           <p:nvPr>
             <p:ph type="title"/>
           </p:nvPr>
@@ -2910,14 +2772,14 @@
           </a:bodyPr>
           <a:lstStyle/>
           <a:p>
-            <a:pPr algn="l" indent="0" marL="0">
+            <a:pPr marL="0" indent="0" algn="l">
               <a:lnSpc>
                 <a:spcPts val="3960"/>
               </a:lnSpc>
               <a:buNone/>
             </a:pPr>
             <a:r>
-              <a:rPr lang="en-US" sz="3600" b="1" i="0" spc="-100" kern="0" dirty="0">
+              <a:rPr lang="en-US" sz="3600" b="1" i="0" kern="0" spc="-100" dirty="0">
                 <a:solidFill>
                   <a:srgbClr val="1D1D1F"/>
                 </a:solidFill>
@@ -2958,7 +2820,7 @@
           </a:bodyPr>
           <a:lstStyle/>
           <a:p>
-            <a:pPr algn="ctr" indent="0" marL="0">
+            <a:pPr marL="0" indent="0" algn="ctr">
               <a:lnSpc>
                 <a:spcPts val="1820"/>
               </a:lnSpc>
@@ -3002,7 +2864,7 @@
           </a:bodyPr>
           <a:lstStyle/>
           <a:p>
-            <a:pPr algn="l" indent="0" marL="0">
+            <a:pPr marL="0" indent="0" algn="l">
               <a:lnSpc>
                 <a:spcPts val="2240"/>
               </a:lnSpc>
@@ -3050,7 +2912,7 @@
           </a:bodyPr>
           <a:lstStyle/>
           <a:p>
-            <a:pPr algn="ctr" indent="0" marL="0">
+            <a:pPr marL="0" indent="0" algn="ctr">
               <a:lnSpc>
                 <a:spcPts val="1820"/>
               </a:lnSpc>
@@ -3094,7 +2956,7 @@
           </a:bodyPr>
           <a:lstStyle/>
           <a:p>
-            <a:pPr algn="l" indent="0" marL="0">
+            <a:pPr marL="0" indent="0" algn="l">
               <a:lnSpc>
                 <a:spcPts val="2240"/>
               </a:lnSpc>
@@ -3142,7 +3004,7 @@
           </a:bodyPr>
           <a:lstStyle/>
           <a:p>
-            <a:pPr algn="ctr" indent="0" marL="0">
+            <a:pPr marL="0" indent="0" algn="ctr">
               <a:lnSpc>
                 <a:spcPts val="1820"/>
               </a:lnSpc>
@@ -3186,7 +3048,7 @@
           </a:bodyPr>
           <a:lstStyle/>
           <a:p>
-            <a:pPr algn="l" indent="0" marL="0">
+            <a:pPr marL="0" indent="0" algn="l">
               <a:lnSpc>
                 <a:spcPts val="2240"/>
               </a:lnSpc>
@@ -3234,7 +3096,7 @@
           </a:bodyPr>
           <a:lstStyle/>
           <a:p>
-            <a:pPr algn="ctr" indent="0" marL="0">
+            <a:pPr marL="0" indent="0" algn="ctr">
               <a:lnSpc>
                 <a:spcPts val="1820"/>
               </a:lnSpc>
@@ -3278,7 +3140,7 @@
           </a:bodyPr>
           <a:lstStyle/>
           <a:p>
-            <a:pPr algn="l" indent="0" marL="0">
+            <a:pPr marL="0" indent="0" algn="l">
               <a:lnSpc>
                 <a:spcPts val="2240"/>
               </a:lnSpc>
@@ -3326,7 +3188,7 @@
           </a:bodyPr>
           <a:lstStyle/>
           <a:p>
-            <a:pPr algn="ctr" indent="0" marL="0">
+            <a:pPr marL="0" indent="0" algn="ctr">
               <a:lnSpc>
                 <a:spcPts val="1820"/>
               </a:lnSpc>
@@ -3368,17 +3230,24 @@
           </a:solidFill>
           <a:ln/>
         </p:spPr>
+        <p:txBody>
+          <a:bodyPr/>
+          <a:lstStyle/>
+          <a:p>
+            <a:endParaRPr lang="en-GB"/>
+          </a:p>
+        </p:txBody>
       </p:sp>
       <p:pic>
         <p:nvPicPr>
-          <p:cNvPr id="13" name="Image 0" descr="Hand-drawn sketch of the Statistics page: a feature dropdown and mean, median, quartiles, min and max for fraud, clean and mixed">    </p:cNvPr>
+          <p:cNvPr id="13" name="Image 0" descr="Hand-drawn sketch of the Statistics page: a feature dropdown and mean, median, quartiles, min and max for fraud, clean and mixed"/>
           <p:cNvPicPr>
             <a:picLocks noChangeAspect="1"/>
           </p:cNvPicPr>
           <p:nvPr/>
         </p:nvPicPr>
         <p:blipFill>
-          <a:blip r:embed="rId1"/>
+          <a:blip r:embed="rId3"/>
           <a:stretch>
             <a:fillRect/>
           </a:stretch>
@@ -3417,6 +3286,13 @@
             <a:prstDash val="solid"/>
           </a:ln>
         </p:spPr>
+        <p:txBody>
+          <a:bodyPr/>
+          <a:lstStyle/>
+          <a:p>
+            <a:endParaRPr lang="en-GB"/>
+          </a:p>
+        </p:txBody>
       </p:sp>
       <p:sp>
         <p:nvSpPr>
@@ -3441,7 +3317,7 @@
           </a:bodyPr>
           <a:lstStyle/>
           <a:p>
-            <a:pPr algn="l" indent="0" marL="0">
+            <a:pPr marL="0" indent="0" algn="l">
               <a:lnSpc>
                 <a:spcPts val="1820"/>
               </a:lnSpc>
@@ -3483,17 +3359,24 @@
           </a:solidFill>
           <a:ln/>
         </p:spPr>
+        <p:txBody>
+          <a:bodyPr/>
+          <a:lstStyle/>
+          <a:p>
+            <a:endParaRPr lang="en-GB"/>
+          </a:p>
+        </p:txBody>
       </p:sp>
       <p:pic>
         <p:nvPicPr>
-          <p:cNvPr id="17" name="Image 1" descr="Hand-drawn sketch of the Fraud classification page: mandatory and optional inputs, a submit button, the verdict and the 3 closest transactions">    </p:cNvPr>
+          <p:cNvPr id="17" name="Image 1" descr="Hand-drawn sketch of the Fraud classification page: mandatory and optional inputs, a submit button, the verdict and the 3 closest transactions"/>
           <p:cNvPicPr>
             <a:picLocks noChangeAspect="1"/>
           </p:cNvPicPr>
           <p:nvPr/>
         </p:nvPicPr>
         <p:blipFill>
-          <a:blip r:embed="rId2"/>
+          <a:blip r:embed="rId4"/>
           <a:stretch>
             <a:fillRect/>
           </a:stretch>
@@ -3532,6 +3415,13 @@
             <a:prstDash val="solid"/>
           </a:ln>
         </p:spPr>
+        <p:txBody>
+          <a:bodyPr/>
+          <a:lstStyle/>
+          <a:p>
+            <a:endParaRPr lang="en-GB"/>
+          </a:p>
+        </p:txBody>
       </p:sp>
       <p:sp>
         <p:nvSpPr>
@@ -3556,7 +3446,7 @@
           </a:bodyPr>
           <a:lstStyle/>
           <a:p>
-            <a:pPr algn="l" indent="0" marL="0">
+            <a:pPr marL="0" indent="0" algn="l">
               <a:lnSpc>
                 <a:spcPts val="1820"/>
               </a:lnSpc>
@@ -3593,6 +3483,7 @@
         <a:solidFill>
           <a:srgbClr val="FBFBFD"/>
         </a:solidFill>
+        <a:effectLst/>
       </p:bgPr>
     </p:bg>
     <p:spTree>
@@ -3612,7 +3503,9 @@
       <p:sp>
         <p:nvSpPr>
           <p:cNvPr id="2" name="Text 0"/>
-          <p:cNvSpPr/>
+          <p:cNvSpPr>
+            <a:spLocks noGrp="1"/>
+          </p:cNvSpPr>
           <p:nvPr>
             <p:ph type="title"/>
           </p:nvPr>
@@ -3634,14 +3527,14 @@
           </a:bodyPr>
           <a:lstStyle/>
           <a:p>
-            <a:pPr algn="l" indent="0" marL="0">
+            <a:pPr marL="0" indent="0" algn="l">
               <a:lnSpc>
                 <a:spcPts val="3960"/>
               </a:lnSpc>
               <a:buNone/>
             </a:pPr>
             <a:r>
-              <a:rPr lang="en-US" sz="3600" b="1" i="0" spc="-100" kern="0" dirty="0">
+              <a:rPr lang="en-US" sz="3600" b="1" i="0" kern="0" spc="-100" dirty="0">
                 <a:solidFill>
                   <a:srgbClr val="1D1D1F"/>
                 </a:solidFill>
@@ -3676,6 +3569,13 @@
           </a:solidFill>
           <a:ln/>
         </p:spPr>
+        <p:txBody>
+          <a:bodyPr/>
+          <a:lstStyle/>
+          <a:p>
+            <a:endParaRPr lang="en-GB"/>
+          </a:p>
+        </p:txBody>
       </p:sp>
       <p:sp>
         <p:nvSpPr>
@@ -3700,7 +3600,7 @@
           </a:bodyPr>
           <a:lstStyle/>
           <a:p>
-            <a:pPr algn="l" indent="0" marL="0">
+            <a:pPr marL="0" indent="0" algn="l">
               <a:lnSpc>
                 <a:spcPts val="5280"/>
               </a:lnSpc>
@@ -3744,7 +3644,7 @@
           </a:bodyPr>
           <a:lstStyle/>
           <a:p>
-            <a:pPr algn="l" indent="0" marL="0">
+            <a:pPr marL="0" indent="0" algn="l">
               <a:lnSpc>
                 <a:spcPts val="2100"/>
               </a:lnSpc>
@@ -3786,6 +3686,13 @@
           </a:solidFill>
           <a:ln/>
         </p:spPr>
+        <p:txBody>
+          <a:bodyPr/>
+          <a:lstStyle/>
+          <a:p>
+            <a:endParaRPr lang="en-GB"/>
+          </a:p>
+        </p:txBody>
       </p:sp>
       <p:sp>
         <p:nvSpPr>
@@ -3810,7 +3717,7 @@
           </a:bodyPr>
           <a:lstStyle/>
           <a:p>
-            <a:pPr algn="l" indent="0" marL="0">
+            <a:pPr marL="0" indent="0" algn="l">
               <a:lnSpc>
                 <a:spcPts val="5280"/>
               </a:lnSpc>
@@ -3854,7 +3761,7 @@
           </a:bodyPr>
           <a:lstStyle/>
           <a:p>
-            <a:pPr algn="l" indent="0" marL="0">
+            <a:pPr marL="0" indent="0" algn="l">
               <a:lnSpc>
                 <a:spcPts val="2100"/>
               </a:lnSpc>
@@ -3896,6 +3803,13 @@
           </a:solidFill>
           <a:ln/>
         </p:spPr>
+        <p:txBody>
+          <a:bodyPr/>
+          <a:lstStyle/>
+          <a:p>
+            <a:endParaRPr lang="en-GB"/>
+          </a:p>
+        </p:txBody>
       </p:sp>
       <p:sp>
         <p:nvSpPr>
@@ -3920,7 +3834,7 @@
           </a:bodyPr>
           <a:lstStyle/>
           <a:p>
-            <a:pPr algn="l" indent="0" marL="0">
+            <a:pPr marL="0" indent="0" algn="l">
               <a:lnSpc>
                 <a:spcPts val="5280"/>
               </a:lnSpc>
@@ -3964,7 +3878,7 @@
           </a:bodyPr>
           <a:lstStyle/>
           <a:p>
-            <a:pPr algn="l" indent="0" marL="0">
+            <a:pPr marL="0" indent="0" algn="l">
               <a:lnSpc>
                 <a:spcPts val="2100"/>
               </a:lnSpc>
@@ -4011,6 +3925,13 @@
             <a:prstDash val="solid"/>
           </a:ln>
         </p:spPr>
+        <p:txBody>
+          <a:bodyPr/>
+          <a:lstStyle/>
+          <a:p>
+            <a:endParaRPr lang="en-GB"/>
+          </a:p>
+        </p:txBody>
       </p:sp>
       <p:sp>
         <p:nvSpPr>
@@ -4035,7 +3956,7 @@
           </a:bodyPr>
           <a:lstStyle/>
           <a:p>
-            <a:pPr algn="l" indent="0" marL="0">
+            <a:pPr marL="0" indent="0" algn="l">
               <a:lnSpc>
                 <a:spcPts val="5280"/>
               </a:lnSpc>
@@ -4079,7 +4000,7 @@
           </a:bodyPr>
           <a:lstStyle/>
           <a:p>
-            <a:pPr algn="l" indent="0" marL="0">
+            <a:pPr marL="0" indent="0" algn="l">
               <a:lnSpc>
                 <a:spcPts val="2100"/>
               </a:lnSpc>
@@ -4123,7 +4044,7 @@
           </a:bodyPr>
           <a:lstStyle/>
           <a:p>
-            <a:pPr algn="l" indent="0" marL="0">
+            <a:pPr marL="0" indent="0" algn="l">
               <a:lnSpc>
                 <a:spcPts val="1680"/>
               </a:lnSpc>
@@ -4160,6 +4081,7 @@
         <a:solidFill>
           <a:srgbClr val="FBFBFD"/>
         </a:solidFill>
+        <a:effectLst/>
       </p:bgPr>
     </p:bg>
     <p:spTree>
@@ -4179,7 +4101,9 @@
       <p:sp>
         <p:nvSpPr>
           <p:cNvPr id="2" name="Text 0"/>
-          <p:cNvSpPr/>
+          <p:cNvSpPr>
+            <a:spLocks noGrp="1"/>
+          </p:cNvSpPr>
           <p:nvPr>
             <p:ph type="title"/>
           </p:nvPr>
@@ -4201,14 +4125,14 @@
           </a:bodyPr>
           <a:lstStyle/>
           <a:p>
-            <a:pPr algn="l" indent="0" marL="0">
+            <a:pPr marL="0" indent="0" algn="l">
               <a:lnSpc>
                 <a:spcPts val="3960"/>
               </a:lnSpc>
               <a:buNone/>
             </a:pPr>
             <a:r>
-              <a:rPr lang="en-US" sz="3600" b="1" i="0" spc="-100" kern="0" dirty="0">
+              <a:rPr lang="en-US" sz="3600" b="1" i="0" kern="0" spc="-100" dirty="0">
                 <a:solidFill>
                   <a:srgbClr val="1D1D1F"/>
                 </a:solidFill>
@@ -4245,14 +4169,14 @@
           </a:bodyPr>
           <a:lstStyle/>
           <a:p>
-            <a:pPr algn="l" indent="0" marL="0">
+            <a:pPr marL="0" indent="0" algn="l">
               <a:lnSpc>
                 <a:spcPts val="1680"/>
               </a:lnSpc>
               <a:buNone/>
             </a:pPr>
             <a:r>
-              <a:rPr lang="en-US" sz="1200" b="1" spc="100" kern="0" dirty="0">
+              <a:rPr lang="en-US" sz="1200" b="1" kern="0" spc="100" dirty="0">
                 <a:solidFill>
                   <a:srgbClr val="6E6E73"/>
                 </a:solidFill>
@@ -4289,7 +4213,7 @@
           </a:bodyPr>
           <a:lstStyle/>
           <a:p>
-            <a:pPr algn="l" indent="0" marL="0">
+            <a:pPr marL="0" indent="0" algn="l">
               <a:lnSpc>
                 <a:spcPts val="3080"/>
               </a:lnSpc>
@@ -4333,7 +4257,7 @@
           </a:bodyPr>
           <a:lstStyle/>
           <a:p>
-            <a:pPr algn="l" indent="0" marL="0">
+            <a:pPr marL="0" indent="0" algn="l">
               <a:lnSpc>
                 <a:spcPts val="2025"/>
               </a:lnSpc>
@@ -4377,7 +4301,7 @@
           </a:bodyPr>
           <a:lstStyle/>
           <a:p>
-            <a:pPr algn="l" indent="0" marL="0">
+            <a:pPr marL="0" indent="0" algn="l">
               <a:lnSpc>
                 <a:spcPts val="3080"/>
               </a:lnSpc>
@@ -4421,7 +4345,7 @@
           </a:bodyPr>
           <a:lstStyle/>
           <a:p>
-            <a:pPr algn="l" indent="0" marL="0">
+            <a:pPr marL="0" indent="0" algn="l">
               <a:lnSpc>
                 <a:spcPts val="2025"/>
               </a:lnSpc>
@@ -4465,7 +4389,7 @@
           </a:bodyPr>
           <a:lstStyle/>
           <a:p>
-            <a:pPr algn="l" indent="0" marL="0">
+            <a:pPr marL="0" indent="0" algn="l">
               <a:lnSpc>
                 <a:spcPts val="3080"/>
               </a:lnSpc>
@@ -4509,7 +4433,7 @@
           </a:bodyPr>
           <a:lstStyle/>
           <a:p>
-            <a:pPr algn="l" indent="0" marL="0">
+            <a:pPr marL="0" indent="0" algn="l">
               <a:lnSpc>
                 <a:spcPts val="2025"/>
               </a:lnSpc>
@@ -4557,7 +4481,7 @@
           </a:bodyPr>
           <a:lstStyle/>
           <a:p>
-            <a:pPr algn="ctr" indent="0" marL="0">
+            <a:pPr marL="0" indent="0" algn="ctr">
               <a:lnSpc>
                 <a:spcPts val="1820"/>
               </a:lnSpc>
@@ -4605,7 +4529,7 @@
           </a:bodyPr>
           <a:lstStyle/>
           <a:p>
-            <a:pPr algn="ctr" indent="0" marL="0">
+            <a:pPr marL="0" indent="0" algn="ctr">
               <a:lnSpc>
                 <a:spcPts val="1820"/>
               </a:lnSpc>
@@ -4653,7 +4577,7 @@
           </a:bodyPr>
           <a:lstStyle/>
           <a:p>
-            <a:pPr algn="ctr" indent="0" marL="0">
+            <a:pPr marL="0" indent="0" algn="ctr">
               <a:lnSpc>
                 <a:spcPts val="1820"/>
               </a:lnSpc>
@@ -4701,7 +4625,7 @@
           </a:bodyPr>
           <a:lstStyle/>
           <a:p>
-            <a:pPr algn="ctr" indent="0" marL="0">
+            <a:pPr marL="0" indent="0" algn="ctr">
               <a:lnSpc>
                 <a:spcPts val="1820"/>
               </a:lnSpc>
@@ -4749,7 +4673,7 @@
           </a:bodyPr>
           <a:lstStyle/>
           <a:p>
-            <a:pPr algn="ctr" indent="0" marL="0">
+            <a:pPr marL="0" indent="0" algn="ctr">
               <a:lnSpc>
                 <a:spcPts val="1820"/>
               </a:lnSpc>
@@ -4796,6 +4720,13 @@
             <a:prstDash val="solid"/>
           </a:ln>
         </p:spPr>
+        <p:txBody>
+          <a:bodyPr/>
+          <a:lstStyle/>
+          <a:p>
+            <a:endParaRPr lang="en-GB"/>
+          </a:p>
+        </p:txBody>
       </p:sp>
       <p:sp>
         <p:nvSpPr>
@@ -4820,14 +4751,14 @@
           </a:bodyPr>
           <a:lstStyle/>
           <a:p>
-            <a:pPr algn="l" indent="0" marL="0">
+            <a:pPr marL="0" indent="0" algn="l">
               <a:lnSpc>
                 <a:spcPts val="9000"/>
               </a:lnSpc>
               <a:buNone/>
             </a:pPr>
             <a:r>
-              <a:rPr lang="en-US" sz="9000" b="1" spc="-300" kern="0" dirty="0">
+              <a:rPr lang="en-US" sz="9000" b="1" kern="0" spc="-300" dirty="0">
                 <a:solidFill>
                   <a:srgbClr val="0071E3"/>
                 </a:solidFill>
@@ -4864,7 +4795,7 @@
           </a:bodyPr>
           <a:lstStyle/>
           <a:p>
-            <a:pPr algn="l" indent="0" marL="0">
+            <a:pPr marL="0" indent="0" algn="l">
               <a:lnSpc>
                 <a:spcPts val="2160"/>
               </a:lnSpc>
@@ -4887,15 +4818,15 @@
       </p:sp>
       <p:pic>
         <p:nvPicPr>
-          <p:cNvPr id="18" name="Image 0" descr="line">    </p:cNvPr>
+          <p:cNvPr id="18" name="Image 0" descr="line"/>
           <p:cNvPicPr>
             <a:picLocks noChangeAspect="1"/>
           </p:cNvPicPr>
           <p:nvPr/>
         </p:nvPicPr>
         <p:blipFill>
-          <a:blip r:embed="rId1"/>
-          <a:srcRect l="-39" r="-39" t="0" b="0"/>
+          <a:blip r:embed="rId3"/>
+          <a:srcRect l="-39" r="-39"/>
           <a:stretch/>
         </p:blipFill>
         <p:spPr>
@@ -4931,7 +4862,7 @@
           </a:bodyPr>
           <a:lstStyle/>
           <a:p>
-            <a:pPr algn="l" indent="0" marL="0">
+            <a:pPr marL="0" indent="0" algn="l">
               <a:lnSpc>
                 <a:spcPts val="3080"/>
               </a:lnSpc>
@@ -4975,7 +4906,7 @@
           </a:bodyPr>
           <a:lstStyle/>
           <a:p>
-            <a:pPr algn="l" indent="0" marL="0">
+            <a:pPr marL="0" indent="0" algn="l">
               <a:lnSpc>
                 <a:spcPts val="1890"/>
               </a:lnSpc>
@@ -5012,6 +4943,7 @@
         <a:solidFill>
           <a:srgbClr val="F5F5F7"/>
         </a:solidFill>
+        <a:effectLst/>
       </p:bgPr>
     </p:bg>
     <p:spTree>
@@ -5031,7 +4963,9 @@
       <p:sp>
         <p:nvSpPr>
           <p:cNvPr id="2" name="Text 0"/>
-          <p:cNvSpPr/>
+          <p:cNvSpPr>
+            <a:spLocks noGrp="1"/>
+          </p:cNvSpPr>
           <p:nvPr>
             <p:ph type="title"/>
           </p:nvPr>
@@ -5053,14 +4987,14 @@
           </a:bodyPr>
           <a:lstStyle/>
           <a:p>
-            <a:pPr algn="l" indent="0" marL="0">
+            <a:pPr marL="0" indent="0" algn="l">
               <a:lnSpc>
                 <a:spcPts val="7350"/>
               </a:lnSpc>
               <a:buNone/>
             </a:pPr>
             <a:r>
-              <a:rPr lang="en-US" sz="7000" b="1" i="0" spc="-200" kern="0" dirty="0">
+              <a:rPr lang="en-US" sz="7000" b="1" i="0" kern="0" spc="-200" dirty="0">
                 <a:solidFill>
                   <a:srgbClr val="1D1D1F"/>
                 </a:solidFill>
@@ -5095,6 +5029,13 @@
           </a:solidFill>
           <a:ln/>
         </p:spPr>
+        <p:txBody>
+          <a:bodyPr/>
+          <a:lstStyle/>
+          <a:p>
+            <a:endParaRPr lang="en-GB"/>
+          </a:p>
+        </p:txBody>
       </p:sp>
       <p:sp>
         <p:nvSpPr>
@@ -5119,7 +5060,7 @@
           </a:bodyPr>
           <a:lstStyle/>
           <a:p>
-            <a:pPr algn="l" indent="0" marL="0">
+            <a:pPr marL="0" indent="0" algn="l">
               <a:lnSpc>
                 <a:spcPts val="1960"/>
               </a:lnSpc>
@@ -5163,7 +5104,7 @@
           </a:bodyPr>
           <a:lstStyle/>
           <a:p>
-            <a:pPr algn="l" indent="0" marL="0">
+            <a:pPr marL="0" indent="0" algn="l">
               <a:lnSpc>
                 <a:spcPts val="2640"/>
               </a:lnSpc>
@@ -5207,7 +5148,7 @@
           </a:bodyPr>
           <a:lstStyle/>
           <a:p>
-            <a:pPr algn="l" indent="0" marL="0">
+            <a:pPr marL="0" indent="0" algn="l">
               <a:lnSpc>
                 <a:spcPts val="2100"/>
               </a:lnSpc>
@@ -5249,6 +5190,13 @@
           </a:solidFill>
           <a:ln/>
         </p:spPr>
+        <p:txBody>
+          <a:bodyPr/>
+          <a:lstStyle/>
+          <a:p>
+            <a:endParaRPr lang="en-GB"/>
+          </a:p>
+        </p:txBody>
       </p:sp>
       <p:sp>
         <p:nvSpPr>
@@ -5273,7 +5221,7 @@
           </a:bodyPr>
           <a:lstStyle/>
           <a:p>
-            <a:pPr algn="l" indent="0" marL="0">
+            <a:pPr marL="0" indent="0" algn="l">
               <a:lnSpc>
                 <a:spcPts val="1960"/>
               </a:lnSpc>
@@ -5317,7 +5265,7 @@
           </a:bodyPr>
           <a:lstStyle/>
           <a:p>
-            <a:pPr algn="l" indent="0" marL="0">
+            <a:pPr marL="0" indent="0" algn="l">
               <a:lnSpc>
                 <a:spcPts val="2640"/>
               </a:lnSpc>
@@ -5361,7 +5309,7 @@
           </a:bodyPr>
           <a:lstStyle/>
           <a:p>
-            <a:pPr algn="l" indent="0" marL="0">
+            <a:pPr marL="0" indent="0" algn="l">
               <a:lnSpc>
                 <a:spcPts val="2100"/>
               </a:lnSpc>
@@ -5398,6 +5346,7 @@
         <a:solidFill>
           <a:srgbClr val="FBFBFD"/>
         </a:solidFill>
+        <a:effectLst/>
       </p:bgPr>
     </p:bg>
     <p:spTree>
@@ -5417,7 +5366,9 @@
       <p:sp>
         <p:nvSpPr>
           <p:cNvPr id="2" name="Text 0"/>
-          <p:cNvSpPr/>
+          <p:cNvSpPr>
+            <a:spLocks noGrp="1"/>
+          </p:cNvSpPr>
           <p:nvPr>
             <p:ph type="title"/>
           </p:nvPr>
@@ -5439,14 +5390,14 @@
           </a:bodyPr>
           <a:lstStyle/>
           <a:p>
-            <a:pPr algn="l" indent="0" marL="0">
+            <a:pPr marL="0" indent="0" algn="l">
               <a:lnSpc>
                 <a:spcPts val="3960"/>
               </a:lnSpc>
               <a:buNone/>
             </a:pPr>
             <a:r>
-              <a:rPr lang="en-US" sz="3600" b="1" i="0" spc="-100" kern="0" dirty="0">
+              <a:rPr lang="en-US" sz="3600" b="1" i="0" kern="0" spc="-100" dirty="0">
                 <a:solidFill>
                   <a:srgbClr val="1D1D1F"/>
                 </a:solidFill>
@@ -5486,6 +5437,13 @@
             <a:prstDash val="solid"/>
           </a:ln>
         </p:spPr>
+        <p:txBody>
+          <a:bodyPr/>
+          <a:lstStyle/>
+          <a:p>
+            <a:endParaRPr lang="en-GB"/>
+          </a:p>
+        </p:txBody>
       </p:sp>
       <p:sp>
         <p:nvSpPr>
@@ -5510,7 +5468,7 @@
           </a:bodyPr>
           <a:lstStyle/>
           <a:p>
-            <a:pPr algn="l" indent="0" marL="0">
+            <a:pPr marL="0" indent="0" algn="l">
               <a:lnSpc>
                 <a:spcPts val="2160"/>
               </a:lnSpc>
@@ -5554,7 +5512,7 @@
           </a:bodyPr>
           <a:lstStyle/>
           <a:p>
-            <a:pPr algn="l" marL="169418" indent="-169418">
+            <a:pPr marL="169418" indent="-169418" algn="l">
               <a:lnSpc>
                 <a:spcPts val="2030"/>
               </a:lnSpc>
@@ -5575,7 +5533,7 @@
             <a:endParaRPr lang="en-US" sz="1400" dirty="0"/>
           </a:p>
           <a:p>
-            <a:pPr algn="l" marL="169418" indent="-169418">
+            <a:pPr marL="169418" indent="-169418" algn="l">
               <a:lnSpc>
                 <a:spcPts val="2030"/>
               </a:lnSpc>
@@ -5596,7 +5554,7 @@
             <a:endParaRPr lang="en-US" sz="1400" dirty="0"/>
           </a:p>
           <a:p>
-            <a:pPr algn="l" marL="169418" indent="-169418">
+            <a:pPr marL="169418" indent="-169418" algn="l">
               <a:lnSpc>
                 <a:spcPts val="2030"/>
               </a:lnSpc>
@@ -5914,4 +5872,319 @@
   <a:objectDefaults/>
   <a:extraClrSchemeLst/>
 </a:theme>
+</file>
+
+<file path=ppt/theme/theme2.xml><?xml version="1.0" encoding="utf-8"?>
+<a:theme xmlns:a="http://schemas.openxmlformats.org/drawingml/2006/main" name="Office Theme">
+  <a:themeElements>
+    <a:clrScheme name="Office">
+      <a:dk1>
+        <a:sysClr val="windowText" lastClr="000000"/>
+      </a:dk1>
+      <a:lt1>
+        <a:sysClr val="window" lastClr="FFFFFF"/>
+      </a:lt1>
+      <a:dk2>
+        <a:srgbClr val="0E2841"/>
+      </a:dk2>
+      <a:lt2>
+        <a:srgbClr val="E8E8E8"/>
+      </a:lt2>
+      <a:accent1>
+        <a:srgbClr val="156082"/>
+      </a:accent1>
+      <a:accent2>
+        <a:srgbClr val="E97132"/>
+      </a:accent2>
+      <a:accent3>
+        <a:srgbClr val="196B24"/>
+      </a:accent3>
+      <a:accent4>
+        <a:srgbClr val="0F9ED5"/>
+      </a:accent4>
+      <a:accent5>
+        <a:srgbClr val="A02B93"/>
+      </a:accent5>
+      <a:accent6>
+        <a:srgbClr val="4EA72E"/>
+      </a:accent6>
+      <a:hlink>
+        <a:srgbClr val="467886"/>
+      </a:hlink>
+      <a:folHlink>
+        <a:srgbClr val="96607D"/>
+      </a:folHlink>
+    </a:clrScheme>
+    <a:fontScheme name="Office">
+      <a:majorFont>
+        <a:latin typeface="Aptos Display" panose="02110004020202020204"/>
+        <a:ea typeface=""/>
+        <a:cs typeface=""/>
+        <a:font script="Jpan" typeface="游ゴシック Light"/>
+        <a:font script="Hang" typeface="맑은 고딕"/>
+        <a:font script="Hans" typeface="等线 Light"/>
+        <a:font script="Hant" typeface="新細明體"/>
+        <a:font script="Arab" typeface="Times New Roman"/>
+        <a:font script="Hebr" typeface="Times New Roman"/>
+        <a:font script="Thai" typeface="Angsana New"/>
+        <a:font script="Ethi" typeface="Nyala"/>
+        <a:font script="Beng" typeface="Vrinda"/>
+        <a:font script="Gujr" typeface="Shruti"/>
+        <a:font script="Khmr" typeface="MoolBoran"/>
+        <a:font script="Knda" typeface="Tunga"/>
+        <a:font script="Guru" typeface="Raavi"/>
+        <a:font script="Cans" typeface="Euphemia"/>
+        <a:font script="Cher" typeface="Plantagenet Cherokee"/>
+        <a:font script="Yiii" typeface="Microsoft Yi Baiti"/>
+        <a:font script="Tibt" typeface="Microsoft Himalaya"/>
+        <a:font script="Thaa" typeface="MV Boli"/>
+        <a:font script="Deva" typeface="Mangal"/>
+        <a:font script="Telu" typeface="Gautami"/>
+        <a:font script="Taml" typeface="Latha"/>
+        <a:font script="Syrc" typeface="Estrangelo Edessa"/>
+        <a:font script="Orya" typeface="Kalinga"/>
+        <a:font script="Mlym" typeface="Kartika"/>
+        <a:font script="Laoo" typeface="DokChampa"/>
+        <a:font script="Sinh" typeface="Iskoola Pota"/>
+        <a:font script="Mong" typeface="Mongolian Baiti"/>
+        <a:font script="Viet" typeface="Times New Roman"/>
+        <a:font script="Uigh" typeface="Microsoft Uighur"/>
+        <a:font script="Geor" typeface="Sylfaen"/>
+        <a:font script="Armn" typeface="Arial"/>
+        <a:font script="Bugi" typeface="Leelawadee UI"/>
+        <a:font script="Bopo" typeface="Microsoft JhengHei"/>
+        <a:font script="Java" typeface="Javanese Text"/>
+        <a:font script="Lisu" typeface="Segoe UI"/>
+        <a:font script="Mymr" typeface="Myanmar Text"/>
+        <a:font script="Nkoo" typeface="Ebrima"/>
+        <a:font script="Olck" typeface="Nirmala UI"/>
+        <a:font script="Osma" typeface="Ebrima"/>
+        <a:font script="Phag" typeface="Phagspa"/>
+        <a:font script="Syrn" typeface="Estrangelo Edessa"/>
+        <a:font script="Syrj" typeface="Estrangelo Edessa"/>
+        <a:font script="Syre" typeface="Estrangelo Edessa"/>
+        <a:font script="Sora" typeface="Nirmala UI"/>
+        <a:font script="Tale" typeface="Microsoft Tai Le"/>
+        <a:font script="Talu" typeface="Microsoft New Tai Lue"/>
+        <a:font script="Tfng" typeface="Ebrima"/>
+      </a:majorFont>
+      <a:minorFont>
+        <a:latin typeface="Aptos" panose="02110004020202020204"/>
+        <a:ea typeface=""/>
+        <a:cs typeface=""/>
+        <a:font script="Jpan" typeface="游ゴシック"/>
+        <a:font script="Hang" typeface="맑은 고딕"/>
+        <a:font script="Hans" typeface="等线"/>
+        <a:font script="Hant" typeface="新細明體"/>
+        <a:font script="Arab" typeface="Arial"/>
+        <a:font script="Hebr" typeface="Arial"/>
+        <a:font script="Thai" typeface="Cordia New"/>
+        <a:font script="Ethi" typeface="Nyala"/>
+        <a:font script="Beng" typeface="Vrinda"/>
+        <a:font script="Gujr" typeface="Shruti"/>
+        <a:font script="Khmr" typeface="DaunPenh"/>
+        <a:font script="Knda" typeface="Tunga"/>
+        <a:font script="Guru" typeface="Raavi"/>
+        <a:font script="Cans" typeface="Euphemia"/>
+        <a:font script="Cher" typeface="Plantagenet Cherokee"/>
+        <a:font script="Yiii" typeface="Microsoft Yi Baiti"/>
+        <a:font script="Tibt" typeface="Microsoft Himalaya"/>
+        <a:font script="Thaa" typeface="MV Boli"/>
+        <a:font script="Deva" typeface="Mangal"/>
+        <a:font script="Telu" typeface="Gautami"/>
+        <a:font script="Taml" typeface="Latha"/>
+        <a:font script="Syrc" typeface="Estrangelo Edessa"/>
+        <a:font script="Orya" typeface="Kalinga"/>
+        <a:font script="Mlym" typeface="Kartika"/>
+        <a:font script="Laoo" typeface="DokChampa"/>
+        <a:font script="Sinh" typeface="Iskoola Pota"/>
+        <a:font script="Mong" typeface="Mongolian Baiti"/>
+        <a:font script="Viet" typeface="Arial"/>
+        <a:font script="Uigh" typeface="Microsoft Uighur"/>
+        <a:font script="Geor" typeface="Sylfaen"/>
+        <a:font script="Armn" typeface="Arial"/>
+        <a:font script="Bugi" typeface="Leelawadee UI"/>
+        <a:font script="Bopo" typeface="Microsoft JhengHei"/>
+        <a:font script="Java" typeface="Javanese Text"/>
+        <a:font script="Lisu" typeface="Segoe UI"/>
+        <a:font script="Mymr" typeface="Myanmar Text"/>
+        <a:font script="Nkoo" typeface="Ebrima"/>
+        <a:font script="Olck" typeface="Nirmala UI"/>
+        <a:font script="Osma" typeface="Ebrima"/>
+        <a:font script="Phag" typeface="Phagspa"/>
+        <a:font script="Syrn" typeface="Estrangelo Edessa"/>
+        <a:font script="Syrj" typeface="Estrangelo Edessa"/>
+        <a:font script="Syre" typeface="Estrangelo Edessa"/>
+        <a:font script="Sora" typeface="Nirmala UI"/>
+        <a:font script="Tale" typeface="Microsoft Tai Le"/>
+        <a:font script="Talu" typeface="Microsoft New Tai Lue"/>
+        <a:font script="Tfng" typeface="Ebrima"/>
+      </a:minorFont>
+    </a:fontScheme>
+    <a:fmtScheme name="Office">
+      <a:fillStyleLst>
+        <a:solidFill>
+          <a:schemeClr val="phClr"/>
+        </a:solidFill>
+        <a:gradFill rotWithShape="1">
+          <a:gsLst>
+            <a:gs pos="0">
+              <a:schemeClr val="phClr">
+                <a:lumMod val="110000"/>
+                <a:satMod val="105000"/>
+                <a:tint val="67000"/>
+              </a:schemeClr>
+            </a:gs>
+            <a:gs pos="50000">
+              <a:schemeClr val="phClr">
+                <a:lumMod val="105000"/>
+                <a:satMod val="103000"/>
+                <a:tint val="73000"/>
+              </a:schemeClr>
+            </a:gs>
+            <a:gs pos="100000">
+              <a:schemeClr val="phClr">
+                <a:lumMod val="105000"/>
+                <a:satMod val="109000"/>
+                <a:tint val="81000"/>
+              </a:schemeClr>
+            </a:gs>
+          </a:gsLst>
+          <a:lin ang="5400000" scaled="0"/>
+        </a:gradFill>
+        <a:gradFill rotWithShape="1">
+          <a:gsLst>
+            <a:gs pos="0">
+              <a:schemeClr val="phClr">
+                <a:satMod val="103000"/>
+                <a:lumMod val="102000"/>
+                <a:tint val="94000"/>
+              </a:schemeClr>
+            </a:gs>
+            <a:gs pos="50000">
+              <a:schemeClr val="phClr">
+                <a:satMod val="110000"/>
+                <a:lumMod val="100000"/>
+                <a:shade val="100000"/>
+              </a:schemeClr>
+            </a:gs>
+            <a:gs pos="100000">
+              <a:schemeClr val="phClr">
+                <a:lumMod val="99000"/>
+                <a:satMod val="120000"/>
+                <a:shade val="78000"/>
+              </a:schemeClr>
+            </a:gs>
+          </a:gsLst>
+          <a:lin ang="5400000" scaled="0"/>
+        </a:gradFill>
+      </a:fillStyleLst>
+      <a:lnStyleLst>
+        <a:ln w="12700" cap="flat" cmpd="sng" algn="ctr">
+          <a:solidFill>
+            <a:schemeClr val="phClr"/>
+          </a:solidFill>
+          <a:prstDash val="solid"/>
+          <a:miter lim="800000"/>
+        </a:ln>
+        <a:ln w="19050" cap="flat" cmpd="sng" algn="ctr">
+          <a:solidFill>
+            <a:schemeClr val="phClr"/>
+          </a:solidFill>
+          <a:prstDash val="solid"/>
+          <a:miter lim="800000"/>
+        </a:ln>
+        <a:ln w="25400" cap="flat" cmpd="sng" algn="ctr">
+          <a:solidFill>
+            <a:schemeClr val="phClr"/>
+          </a:solidFill>
+          <a:prstDash val="solid"/>
+          <a:miter lim="800000"/>
+        </a:ln>
+      </a:lnStyleLst>
+      <a:effectStyleLst>
+        <a:effectStyle>
+          <a:effectLst/>
+        </a:effectStyle>
+        <a:effectStyle>
+          <a:effectLst/>
+        </a:effectStyle>
+        <a:effectStyle>
+          <a:effectLst>
+            <a:outerShdw blurRad="57150" dist="19050" dir="5400000" algn="ctr" rotWithShape="0">
+              <a:srgbClr val="000000">
+                <a:alpha val="63000"/>
+              </a:srgbClr>
+            </a:outerShdw>
+          </a:effectLst>
+        </a:effectStyle>
+      </a:effectStyleLst>
+      <a:bgFillStyleLst>
+        <a:solidFill>
+          <a:schemeClr val="phClr"/>
+        </a:solidFill>
+        <a:solidFill>
+          <a:schemeClr val="phClr">
+            <a:tint val="95000"/>
+            <a:satMod val="170000"/>
+          </a:schemeClr>
+        </a:solidFill>
+        <a:gradFill rotWithShape="1">
+          <a:gsLst>
+            <a:gs pos="0">
+              <a:schemeClr val="phClr">
+                <a:tint val="93000"/>
+                <a:satMod val="150000"/>
+                <a:shade val="98000"/>
+                <a:lumMod val="102000"/>
+              </a:schemeClr>
+            </a:gs>
+            <a:gs pos="50000">
+              <a:schemeClr val="phClr">
+                <a:tint val="98000"/>
+                <a:satMod val="130000"/>
+                <a:shade val="90000"/>
+                <a:lumMod val="103000"/>
+              </a:schemeClr>
+            </a:gs>
+            <a:gs pos="100000">
+              <a:schemeClr val="phClr">
+                <a:shade val="63000"/>
+                <a:satMod val="120000"/>
+              </a:schemeClr>
+            </a:gs>
+          </a:gsLst>
+          <a:lin ang="5400000" scaled="0"/>
+        </a:gradFill>
+      </a:bgFillStyleLst>
+    </a:fmtScheme>
+  </a:themeElements>
+  <a:objectDefaults>
+    <a:lnDef>
+      <a:spPr/>
+      <a:bodyPr/>
+      <a:lstStyle/>
+      <a:style>
+        <a:lnRef idx="2">
+          <a:schemeClr val="accent1"/>
+        </a:lnRef>
+        <a:fillRef idx="0">
+          <a:schemeClr val="accent1"/>
+        </a:fillRef>
+        <a:effectRef idx="1">
+          <a:schemeClr val="accent1"/>
+        </a:effectRef>
+        <a:fontRef idx="minor">
+          <a:schemeClr val="tx1"/>
+        </a:fontRef>
+      </a:style>
+    </a:lnDef>
+  </a:objectDefaults>
+  <a:extraClrSchemeLst/>
+  <a:extLst>
+    <a:ext uri="{05A4C25C-085E-4340-85A3-A5531E510DB2}">
+      <thm15:themeFamily xmlns:thm15="http://schemas.microsoft.com/office/thememl/2012/main" name="Office Theme" id="{2E142A2C-CD16-42D6-873A-C26D2A0506FA}" vid="{1BDDFF52-6CD6-40A5-AB3C-68EB2F1E4D0A}"/>
+    </a:ext>
+  </a:extLst>
+</a:theme>
 </file>
--- a/Crypto Fraud Presentation.pptx
+++ b/Crypto Fraud Presentation.pptx
@@ -124,7 +124,7 @@
   <pc:docChgLst>
     <pc:chgData name="Manolis Tsiftsis" userId="04aaece2082b40e7" providerId="LiveId" clId="{48442419-AC4D-4915-A70C-70FF2F296BDB}"/>
     <pc:docChg chg="modSld">
-      <pc:chgData name="Manolis Tsiftsis" userId="04aaece2082b40e7" providerId="LiveId" clId="{48442419-AC4D-4915-A70C-70FF2F296BDB}" dt="2026-10-18T20:48:25.552" v="13" actId="20577"/>
+      <pc:chgData name="Manolis Tsiftsis" userId="04aaece2082b40e7" providerId="LiveId" clId="{48442419-AC4D-4915-A70C-70FF2F296BDB}" dt="2026-10-20T16:04:37.524" v="73" actId="20577"/>
       <pc:docMkLst>
         <pc:docMk/>
       </pc:docMkLst>
@@ -135,12 +135,20 @@
           <pc:sldMk cId="0" sldId="256"/>
         </pc:sldMkLst>
       </pc:sldChg>
-      <pc:sldChg chg="modNotesTx">
-        <pc:chgData name="Manolis Tsiftsis" userId="04aaece2082b40e7" providerId="LiveId" clId="{48442419-AC4D-4915-A70C-70FF2F296BDB}" dt="2026-10-18T20:47:54.110" v="5" actId="20577"/>
+      <pc:sldChg chg="modSp mod modNotesTx">
+        <pc:chgData name="Manolis Tsiftsis" userId="04aaece2082b40e7" providerId="LiveId" clId="{48442419-AC4D-4915-A70C-70FF2F296BDB}" dt="2026-10-20T16:04:37.524" v="73" actId="20577"/>
         <pc:sldMkLst>
           <pc:docMk/>
           <pc:sldMk cId="0" sldId="257"/>
         </pc:sldMkLst>
+        <pc:spChg chg="mod">
+          <ac:chgData name="Manolis Tsiftsis" userId="04aaece2082b40e7" providerId="LiveId" clId="{48442419-AC4D-4915-A70C-70FF2F296BDB}" dt="2026-10-20T16:04:37.524" v="73" actId="20577"/>
+          <ac:spMkLst>
+            <pc:docMk/>
+            <pc:sldMk cId="0" sldId="257"/>
+            <ac:spMk id="4" creationId="{00000000-0000-0000-0000-000000000000}"/>
+          </ac:spMkLst>
+        </pc:spChg>
       </pc:sldChg>
       <pc:sldChg chg="modNotesTx">
         <pc:chgData name="Manolis Tsiftsis" userId="04aaece2082b40e7" providerId="LiveId" clId="{48442419-AC4D-4915-A70C-70FF2F296BDB}" dt="2026-10-18T20:48:02.434" v="8" actId="20577"/>
@@ -1860,7 +1868,18 @@
                 <a:ea typeface="Inter" pitchFamily="34" charset="-122"/>
                 <a:cs typeface="Inter" pitchFamily="34" charset="-120"/>
               </a:rPr>
-              <a:t>Vadim</a:t>
+              <a:t>Vadim()  #he is </a:t>
+            </a:r>
+            <a:r>
+              <a:rPr lang="en-US" sz="2800">
+                <a:solidFill>
+                  <a:srgbClr val="1D1D1F"/>
+                </a:solidFill>
+                <a:latin typeface="Inter" pitchFamily="34" charset="0"/>
+                <a:ea typeface="Inter" pitchFamily="34" charset="-122"/>
+                <a:cs typeface="Inter" pitchFamily="34" charset="-120"/>
+              </a:rPr>
+              <a:t>a function </a:t>
             </a:r>
             <a:endParaRPr lang="en-US" sz="2800" dirty="0"/>
           </a:p>
